--- a/coastal-13-just-listed.pptx
+++ b/coastal-13-just-listed.pptx
@@ -3360,8 +3360,8 @@
         </p:nvSpPr>
         <p:spPr>
           <a:xfrm>
-            <a:off x="762000" y="15840075"/>
-            <a:ext cx="2914352" cy="9525"/>
+            <a:off x="762000" y="15621000"/>
+            <a:ext cx="4018657" cy="9525"/>
           </a:xfrm>
           <a:prstGeom prst="rect">
             <a:avLst/>
@@ -3405,7 +3405,7 @@
         <p:spPr>
           <a:xfrm>
             <a:off x="762000" y="16373475"/>
-            <a:ext cx="2914352" cy="9525"/>
+            <a:ext cx="4018657" cy="9525"/>
           </a:xfrm>
           <a:prstGeom prst="rect">
             <a:avLst/>
@@ -3448,8 +3448,8 @@
         </p:nvSpPr>
         <p:spPr>
           <a:xfrm>
-            <a:off x="762000" y="15840075"/>
-            <a:ext cx="9525" cy="542925"/>
+            <a:off x="762000" y="15621000"/>
+            <a:ext cx="9525" cy="762000"/>
           </a:xfrm>
           <a:prstGeom prst="rect">
             <a:avLst/>
@@ -3492,8 +3492,8 @@
         </p:nvSpPr>
         <p:spPr>
           <a:xfrm>
-            <a:off x="3666827" y="15840075"/>
-            <a:ext cx="9525" cy="542925"/>
+            <a:off x="4771132" y="15621000"/>
+            <a:ext cx="9525" cy="762000"/>
           </a:xfrm>
           <a:prstGeom prst="rect">
             <a:avLst/>
@@ -3536,7 +3536,7 @@
         </p:nvSpPr>
         <p:spPr>
           <a:xfrm>
-            <a:off x="1041493" y="16057656"/>
+            <a:off x="1079593" y="15948118"/>
             <a:ext cx="107763" cy="107763"/>
           </a:xfrm>
           <a:prstGeom prst="rect">
@@ -3619,8 +3619,8 @@
         </p:nvSpPr>
         <p:spPr>
           <a:xfrm>
-            <a:off x="7707511" y="938212"/>
-            <a:ext cx="3288982" cy="104775"/>
+            <a:off x="6684169" y="904875"/>
+            <a:ext cx="4926330" cy="171450"/>
           </a:xfrm>
           <a:prstGeom prst="rect">
             <a:avLst/>
@@ -3633,7 +3633,7 @@
           <a:p>
             <a:pPr algn="l"/>
             <a:r>
-              <a:rPr sz="750" i="0" b="1" spc="240">
+              <a:rPr sz="1200" i="0" b="1" spc="360">
                 <a:solidFill>
                   <a:srgbClr val="F3EEE7"/>
                 </a:solidFill>
@@ -3690,7 +3690,7 @@
         <p:spPr>
           <a:xfrm>
             <a:off x="762000" y="9620250"/>
-            <a:ext cx="14401800" cy="142875"/>
+            <a:ext cx="14401800" cy="228600"/>
           </a:xfrm>
           <a:prstGeom prst="rect">
             <a:avLst/>
@@ -3703,7 +3703,7 @@
           <a:p>
             <a:pPr algn="l"/>
             <a:r>
-              <a:rPr sz="975" i="0" b="1" spc="351">
+              <a:rPr sz="1575" i="0" b="1" spc="472">
                 <a:solidFill>
                   <a:srgbClr val="A98BA6"/>
                 </a:solidFill>
@@ -3724,7 +3724,7 @@
         </p:nvSpPr>
         <p:spPr>
           <a:xfrm>
-            <a:off x="762000" y="9934575"/>
+            <a:off x="762000" y="10020300"/>
             <a:ext cx="14401800" cy="685800"/>
           </a:xfrm>
           <a:prstGeom prst="rect">
@@ -3763,8 +3763,8 @@
         </p:nvSpPr>
         <p:spPr>
           <a:xfrm>
-            <a:off x="762000" y="10753725"/>
-            <a:ext cx="14401800" cy="133350"/>
+            <a:off x="762000" y="10858500"/>
+            <a:ext cx="14401800" cy="190500"/>
           </a:xfrm>
           <a:prstGeom prst="rect">
             <a:avLst/>
@@ -3777,7 +3777,7 @@
           <a:p>
             <a:pPr algn="l"/>
             <a:r>
-              <a:rPr sz="900" i="0" b="1" spc="216">
+              <a:rPr sz="1275" i="0" b="1" spc="255">
                 <a:solidFill>
                   <a:srgbClr val="F3EEE7"/>
                 </a:solidFill>
@@ -3798,7 +3798,7 @@
         </p:nvSpPr>
         <p:spPr>
           <a:xfrm>
-            <a:off x="762000" y="11077575"/>
+            <a:off x="762000" y="11239500"/>
             <a:ext cx="14401800" cy="657225"/>
           </a:xfrm>
           <a:prstGeom prst="rect">
@@ -3833,8 +3833,8 @@
         </p:nvSpPr>
         <p:spPr>
           <a:xfrm>
-            <a:off x="1266825" y="16035338"/>
-            <a:ext cx="3352324" cy="152400"/>
+            <a:off x="1323975" y="15878175"/>
+            <a:ext cx="4936331" cy="247650"/>
           </a:xfrm>
           <a:prstGeom prst="rect">
             <a:avLst/>
@@ -3847,7 +3847,7 @@
           <a:p>
             <a:pPr algn="l"/>
             <a:r>
-              <a:rPr sz="1050" i="0" b="1" spc="231">
+              <a:rPr sz="1650" i="0" b="1" spc="330">
                 <a:solidFill>
                   <a:srgbClr val="F3EEE7"/>
                 </a:solidFill>
@@ -3868,7 +3868,7 @@
         </p:nvSpPr>
         <p:spPr>
           <a:xfrm>
-            <a:off x="3257252" y="16021050"/>
+            <a:off x="4323457" y="15911512"/>
             <a:ext cx="579120" cy="180975"/>
           </a:xfrm>
           <a:prstGeom prst="rect">
@@ -3903,8 +3903,8 @@
         </p:nvSpPr>
         <p:spPr>
           <a:xfrm>
-            <a:off x="-2057400" y="17306925"/>
-            <a:ext cx="14401800" cy="123825"/>
+            <a:off x="-2057400" y="17249775"/>
+            <a:ext cx="14401800" cy="180975"/>
           </a:xfrm>
           <a:prstGeom prst="rect">
             <a:avLst/>
@@ -3917,7 +3917,7 @@
           <a:p>
             <a:pPr algn="ctr"/>
             <a:r>
-              <a:rPr sz="825" i="0" b="1" spc="264">
+              <a:rPr sz="1200" i="0" b="1" spc="360">
                 <a:solidFill>
                   <a:srgbClr val="F3EEE7"/>
                 </a:solidFill>

--- a/coastal-13-just-listed.pptx
+++ b/coastal-13-just-listed.pptx
@@ -3317,7 +3317,7 @@
         <p:spPr>
           <a:xfrm>
             <a:off x="762000" y="2190750"/>
-            <a:ext cx="1320105" cy="266700"/>
+            <a:ext cx="2013496" cy="438150"/>
           </a:xfrm>
           <a:prstGeom prst="rect">
             <a:avLst/>
@@ -3360,8 +3360,8 @@
         </p:nvSpPr>
         <p:spPr>
           <a:xfrm>
-            <a:off x="762000" y="15621000"/>
-            <a:ext cx="4018657" cy="9525"/>
+            <a:off x="762000" y="15516225"/>
+            <a:ext cx="4749701" cy="9525"/>
           </a:xfrm>
           <a:prstGeom prst="rect">
             <a:avLst/>
@@ -3405,7 +3405,7 @@
         <p:spPr>
           <a:xfrm>
             <a:off x="762000" y="16373475"/>
-            <a:ext cx="4018657" cy="9525"/>
+            <a:ext cx="4749701" cy="9525"/>
           </a:xfrm>
           <a:prstGeom prst="rect">
             <a:avLst/>
@@ -3448,8 +3448,8 @@
         </p:nvSpPr>
         <p:spPr>
           <a:xfrm>
-            <a:off x="762000" y="15621000"/>
-            <a:ext cx="9525" cy="762000"/>
+            <a:off x="762000" y="15516225"/>
+            <a:ext cx="9525" cy="866775"/>
           </a:xfrm>
           <a:prstGeom prst="rect">
             <a:avLst/>
@@ -3492,8 +3492,8 @@
         </p:nvSpPr>
         <p:spPr>
           <a:xfrm>
-            <a:off x="4771132" y="15621000"/>
-            <a:ext cx="9525" cy="762000"/>
+            <a:off x="5502176" y="15516225"/>
+            <a:ext cx="9525" cy="866775"/>
           </a:xfrm>
           <a:prstGeom prst="rect">
             <a:avLst/>
@@ -3536,7 +3536,7 @@
         </p:nvSpPr>
         <p:spPr>
           <a:xfrm>
-            <a:off x="1079593" y="15948118"/>
+            <a:off x="1117693" y="15895731"/>
             <a:ext cx="107763" cy="107763"/>
           </a:xfrm>
           <a:prstGeom prst="rect">
@@ -3619,8 +3619,8 @@
         </p:nvSpPr>
         <p:spPr>
           <a:xfrm>
-            <a:off x="6684169" y="904875"/>
-            <a:ext cx="4926330" cy="171450"/>
+            <a:off x="6310759" y="885825"/>
+            <a:ext cx="5523786" cy="209550"/>
           </a:xfrm>
           <a:prstGeom prst="rect">
             <a:avLst/>
@@ -3633,7 +3633,7 @@
           <a:p>
             <a:pPr algn="l"/>
             <a:r>
-              <a:rPr sz="1200" i="0" b="1" spc="360">
+              <a:rPr sz="1425" i="0" b="1" spc="370">
                 <a:solidFill>
                   <a:srgbClr val="F3EEE7"/>
                 </a:solidFill>
@@ -3655,7 +3655,7 @@
         <p:spPr>
           <a:xfrm>
             <a:off x="762000" y="2190750"/>
-            <a:ext cx="1320105" cy="266700"/>
+            <a:ext cx="2013496" cy="438150"/>
           </a:xfrm>
           <a:prstGeom prst="rect">
             <a:avLst/>
@@ -3668,7 +3668,7 @@
           <a:p>
             <a:pPr algn="l"/>
             <a:r>
-              <a:rPr sz="825" i="0" b="1" spc="247">
+              <a:rPr sz="1425" i="0" b="1" spc="313">
                 <a:solidFill>
                   <a:srgbClr val="F3EEE7"/>
                 </a:solidFill>
@@ -3690,7 +3690,7 @@
         <p:spPr>
           <a:xfrm>
             <a:off x="762000" y="9620250"/>
-            <a:ext cx="14401800" cy="228600"/>
+            <a:ext cx="14401800" cy="247650"/>
           </a:xfrm>
           <a:prstGeom prst="rect">
             <a:avLst/>
@@ -3703,7 +3703,7 @@
           <a:p>
             <a:pPr algn="l"/>
             <a:r>
-              <a:rPr sz="1575" i="0" b="1" spc="472">
+              <a:rPr sz="1650" i="0" b="1" spc="462">
                 <a:solidFill>
                   <a:srgbClr val="A98BA6"/>
                 </a:solidFill>
@@ -3724,7 +3724,7 @@
         </p:nvSpPr>
         <p:spPr>
           <a:xfrm>
-            <a:off x="762000" y="10020300"/>
+            <a:off x="762000" y="10039350"/>
             <a:ext cx="14401800" cy="685800"/>
           </a:xfrm>
           <a:prstGeom prst="rect">
@@ -3763,8 +3763,8 @@
         </p:nvSpPr>
         <p:spPr>
           <a:xfrm>
-            <a:off x="762000" y="10858500"/>
-            <a:ext cx="14401800" cy="190500"/>
+            <a:off x="762000" y="10896600"/>
+            <a:ext cx="14401800" cy="219075"/>
           </a:xfrm>
           <a:prstGeom prst="rect">
             <a:avLst/>
@@ -3777,7 +3777,7 @@
           <a:p>
             <a:pPr algn="l"/>
             <a:r>
-              <a:rPr sz="1275" i="0" b="1" spc="255">
+              <a:rPr sz="1500" i="0" b="1" spc="240">
                 <a:solidFill>
                   <a:srgbClr val="F3EEE7"/>
                 </a:solidFill>
@@ -3798,7 +3798,7 @@
         </p:nvSpPr>
         <p:spPr>
           <a:xfrm>
-            <a:off x="762000" y="11239500"/>
+            <a:off x="762000" y="11306175"/>
             <a:ext cx="14401800" cy="657225"/>
           </a:xfrm>
           <a:prstGeom prst="rect">
@@ -3833,8 +3833,8 @@
         </p:nvSpPr>
         <p:spPr>
           <a:xfrm>
-            <a:off x="1323975" y="15878175"/>
-            <a:ext cx="4936331" cy="247650"/>
+            <a:off x="1362075" y="15801975"/>
+            <a:ext cx="5831681" cy="295275"/>
           </a:xfrm>
           <a:prstGeom prst="rect">
             <a:avLst/>
@@ -3847,7 +3847,7 @@
           <a:p>
             <a:pPr algn="l"/>
             <a:r>
-              <a:rPr sz="1650" i="0" b="1" spc="330">
+              <a:rPr sz="2025" i="0" b="1" spc="364">
                 <a:solidFill>
                   <a:srgbClr val="F3EEE7"/>
                 </a:solidFill>
@@ -3868,8 +3868,8 @@
         </p:nvSpPr>
         <p:spPr>
           <a:xfrm>
-            <a:off x="4323457" y="15911512"/>
-            <a:ext cx="579120" cy="180975"/>
+            <a:off x="4921151" y="15792450"/>
+            <a:ext cx="731520" cy="314325"/>
           </a:xfrm>
           <a:prstGeom prst="rect">
             <a:avLst/>
@@ -3882,7 +3882,7 @@
           <a:p>
             <a:pPr algn="l"/>
             <a:r>
-              <a:rPr sz="1200" i="0" b="0">
+              <a:rPr sz="2100" i="0" b="0">
                 <a:solidFill>
                   <a:srgbClr val="A98BA6"/>
                 </a:solidFill>
@@ -3903,8 +3903,8 @@
         </p:nvSpPr>
         <p:spPr>
           <a:xfrm>
-            <a:off x="-2057400" y="17249775"/>
-            <a:ext cx="14401800" cy="180975"/>
+            <a:off x="-2057400" y="17211675"/>
+            <a:ext cx="14401800" cy="219075"/>
           </a:xfrm>
           <a:prstGeom prst="rect">
             <a:avLst/>
@@ -3917,7 +3917,7 @@
           <a:p>
             <a:pPr algn="ctr"/>
             <a:r>
-              <a:rPr sz="1200" i="0" b="1" spc="360">
+              <a:rPr sz="1425" i="0" b="1" spc="370">
                 <a:solidFill>
                   <a:srgbClr val="F3EEE7"/>
                 </a:solidFill>
